--- a/TA_PemesananTiketBioskop_Faris_Presentasi.pptx
+++ b/TA_PemesananTiketBioskop_Faris_Presentasi.pptx
@@ -1964,8 +1964,8 @@
         </p:nvSpPr>
         <p:spPr>
           <a:xfrm>
-            <a:off x="411480" y="1719072"/>
-            <a:ext cx="3794760" cy="3035808"/>
+            <a:off x="411480" y="2478405"/>
+            <a:ext cx="3794760" cy="2276475"/>
           </a:xfrm>
           <a:prstGeom prst="rect">
             <a:avLst/>
@@ -2013,7 +2013,7 @@
                 <a:ea typeface="Calibri" panose="020F0502020204030204" pitchFamily="34" charset="-122"/>
                 <a:cs typeface="Calibri" panose="020F0502020204030204" pitchFamily="34" charset="-120"/>
               </a:rPr>
-              <a:t>Pemilihan film, teater, jadwal &amp; kursi real-time</a:t>
+              <a:t>Pemilihan film, teater, jadwal &amp; kursi yang nyata</a:t>
             </a:r>
             <a:endParaRPr lang="en-US" sz="1200" dirty="0"/>
           </a:p>
@@ -2346,7 +2346,7 @@
             </a:pPr>
             <a:r>
               <a:rPr lang="en-US" sz="1200" dirty="0"/>
-              <a:t>Tidak ada Sistem Review dan Rating Film</a:t>
+              <a:t>Tidak ada Sistem Review dan Rating</a:t>
             </a:r>
             <a:endParaRPr lang="en-US" sz="1200" dirty="0"/>
           </a:p>
@@ -2824,7 +2824,7 @@
                 <a:ea typeface="Calibri" panose="020F0502020204030204" pitchFamily="34" charset="-122"/>
                 <a:cs typeface="Calibri" panose="020F0502020204030204" pitchFamily="34" charset="-120"/>
               </a:rPr>
-              <a:t>Upload bukti pembayaran</a:t>
+              <a:t>Melakukan pembayaran</a:t>
             </a:r>
             <a:endParaRPr lang="en-US" sz="1100" dirty="0"/>
           </a:p>
@@ -2987,6 +2987,12 @@
             </a:outerShdw>
           </a:effectLst>
         </p:spPr>
+        <p:txBody>
+          <a:bodyPr/>
+          <a:p>
+            <a:endParaRPr lang="en-US"/>
+          </a:p>
+        </p:txBody>
       </p:sp>
       <p:sp>
         <p:nvSpPr>
@@ -3242,31 +3248,6 @@
       </p:sp>
       <p:sp>
         <p:nvSpPr>
-          <p:cNvPr id="29" name="Shape 27"/>
-          <p:cNvSpPr/>
-          <p:nvPr/>
-        </p:nvSpPr>
-        <p:spPr>
-          <a:xfrm>
-            <a:off x="3310128" y="3401568"/>
-            <a:ext cx="54864" cy="274320"/>
-          </a:xfrm>
-          <a:prstGeom prst="rect">
-            <a:avLst/>
-          </a:prstGeom>
-          <a:solidFill>
-            <a:srgbClr val="28A745"/>
-          </a:solidFill>
-          <a:ln w="12700">
-            <a:solidFill>
-              <a:srgbClr val="28A745"/>
-            </a:solidFill>
-            <a:prstDash val="solid"/>
-          </a:ln>
-        </p:spPr>
-      </p:sp>
-      <p:sp>
-        <p:nvSpPr>
           <p:cNvPr id="30" name="Text 28"/>
           <p:cNvSpPr/>
           <p:nvPr/>
@@ -3275,6 +3256,58 @@
           <a:xfrm>
             <a:off x="3456432" y="3419856"/>
             <a:ext cx="2377440" cy="320040"/>
+          </a:xfrm>
+          <a:prstGeom prst="rect">
+            <a:avLst/>
+          </a:prstGeom>
+          <a:noFill/>
+        </p:spPr>
+        <p:txBody>
+          <a:bodyPr wrap="square" lIns="0" tIns="0" rIns="0" bIns="0" rtlCol="0" anchor="ctr"/>
+          <a:lstStyle/>
+          <a:p>
+            <a:pPr marL="0" indent="0">
+              <a:buNone/>
+            </a:pPr>
+            <a:endParaRPr lang="en-US" sz="1100" dirty="0"/>
+          </a:p>
+        </p:txBody>
+      </p:sp>
+      <p:sp>
+        <p:nvSpPr>
+          <p:cNvPr id="31" name="Shape 29"/>
+          <p:cNvSpPr/>
+          <p:nvPr/>
+        </p:nvSpPr>
+        <p:spPr>
+          <a:xfrm>
+            <a:off x="3310128" y="3395091"/>
+            <a:ext cx="54864" cy="274320"/>
+          </a:xfrm>
+          <a:prstGeom prst="rect">
+            <a:avLst/>
+          </a:prstGeom>
+          <a:solidFill>
+            <a:srgbClr val="28A745"/>
+          </a:solidFill>
+          <a:ln w="12700">
+            <a:solidFill>
+              <a:srgbClr val="28A745"/>
+            </a:solidFill>
+            <a:prstDash val="solid"/>
+          </a:ln>
+        </p:spPr>
+      </p:sp>
+      <p:sp>
+        <p:nvSpPr>
+          <p:cNvPr id="32" name="Text 30"/>
+          <p:cNvSpPr/>
+          <p:nvPr/>
+        </p:nvSpPr>
+        <p:spPr>
+          <a:xfrm>
+            <a:off x="3456305" y="3266440"/>
+            <a:ext cx="2377440" cy="485775"/>
           </a:xfrm>
           <a:prstGeom prst="rect">
             <a:avLst/>
@@ -3297,7 +3330,7 @@
                 <a:ea typeface="Calibri" panose="020F0502020204030204" pitchFamily="34" charset="-122"/>
                 <a:cs typeface="Calibri" panose="020F0502020204030204" pitchFamily="34" charset="-120"/>
               </a:rPr>
-              <a:t>Verifikasi pembayaran user</a:t>
+              <a:t>Lihat laporan keuangan</a:t>
             </a:r>
             <a:endParaRPr lang="en-US" sz="1100" dirty="0"/>
           </a:p>
@@ -3305,13 +3338,13 @@
       </p:sp>
       <p:sp>
         <p:nvSpPr>
-          <p:cNvPr id="31" name="Shape 29"/>
-          <p:cNvSpPr/>
-          <p:nvPr/>
-        </p:nvSpPr>
-        <p:spPr>
-          <a:xfrm>
-            <a:off x="3310128" y="3877056"/>
+          <p:cNvPr id="33" name="Shape 31"/>
+          <p:cNvSpPr/>
+          <p:nvPr/>
+        </p:nvSpPr>
+        <p:spPr>
+          <a:xfrm>
+            <a:off x="3310128" y="3833749"/>
             <a:ext cx="54864" cy="274320"/>
           </a:xfrm>
           <a:prstGeom prst="rect">
@@ -3330,77 +3363,14 @@
       </p:sp>
       <p:sp>
         <p:nvSpPr>
-          <p:cNvPr id="32" name="Text 30"/>
-          <p:cNvSpPr/>
-          <p:nvPr/>
-        </p:nvSpPr>
-        <p:spPr>
-          <a:xfrm>
-            <a:off x="3456432" y="3895344"/>
-            <a:ext cx="2377440" cy="320040"/>
-          </a:xfrm>
-          <a:prstGeom prst="rect">
-            <a:avLst/>
-          </a:prstGeom>
-          <a:noFill/>
-        </p:spPr>
-        <p:txBody>
-          <a:bodyPr wrap="square" lIns="0" tIns="0" rIns="0" bIns="0" rtlCol="0" anchor="ctr"/>
-          <a:lstStyle/>
-          <a:p>
-            <a:pPr marL="0" indent="0">
-              <a:buNone/>
-            </a:pPr>
-            <a:r>
-              <a:rPr lang="en-US" sz="1100" dirty="0">
-                <a:solidFill>
-                  <a:srgbClr val="E0E0E0"/>
-                </a:solidFill>
-                <a:latin typeface="Calibri" panose="020F0502020204030204" pitchFamily="34" charset="0"/>
-                <a:ea typeface="Calibri" panose="020F0502020204030204" pitchFamily="34" charset="-122"/>
-                <a:cs typeface="Calibri" panose="020F0502020204030204" pitchFamily="34" charset="-120"/>
-              </a:rPr>
-              <a:t>Lihat laporan keuangan</a:t>
-            </a:r>
-            <a:endParaRPr lang="en-US" sz="1100" dirty="0"/>
-          </a:p>
-        </p:txBody>
-      </p:sp>
-      <p:sp>
-        <p:nvSpPr>
-          <p:cNvPr id="33" name="Shape 31"/>
-          <p:cNvSpPr/>
-          <p:nvPr/>
-        </p:nvSpPr>
-        <p:spPr>
-          <a:xfrm>
-            <a:off x="3310128" y="4352544"/>
-            <a:ext cx="54864" cy="274320"/>
-          </a:xfrm>
-          <a:prstGeom prst="rect">
-            <a:avLst/>
-          </a:prstGeom>
-          <a:solidFill>
-            <a:srgbClr val="28A745"/>
-          </a:solidFill>
-          <a:ln w="12700">
-            <a:solidFill>
-              <a:srgbClr val="28A745"/>
-            </a:solidFill>
-            <a:prstDash val="solid"/>
-          </a:ln>
-        </p:spPr>
-      </p:sp>
-      <p:sp>
-        <p:nvSpPr>
           <p:cNvPr id="34" name="Text 32"/>
           <p:cNvSpPr/>
           <p:nvPr/>
         </p:nvSpPr>
         <p:spPr>
           <a:xfrm>
-            <a:off x="3456432" y="4370832"/>
-            <a:ext cx="2377440" cy="320040"/>
+            <a:off x="3456305" y="3787775"/>
+            <a:ext cx="2377440" cy="363855"/>
           </a:xfrm>
           <a:prstGeom prst="rect">
             <a:avLst/>
@@ -3581,7 +3551,7 @@
                 <a:ea typeface="Calibri" panose="020F0502020204030204" pitchFamily="34" charset="-122"/>
                 <a:cs typeface="Calibri" panose="020F0502020204030204" pitchFamily="34" charset="-120"/>
               </a:rPr>
-              <a:t>Login (tidak bisa daftar sendiri)</a:t>
+              <a:t>Login (akun dibuat Admin lainnya)</a:t>
             </a:r>
             <a:endParaRPr lang="en-US" sz="1100" dirty="0"/>
           </a:p>
@@ -4436,7 +4406,7 @@
                 <a:ea typeface="Calibri" panose="020F0502020204030204" pitchFamily="34" charset="-122"/>
                 <a:cs typeface="Calibri" panose="020F0502020204030204" pitchFamily="34" charset="-120"/>
               </a:rPr>
-              <a:t>💰  Harga Dinamis</a:t>
+              <a:t>💰  Harga Statis</a:t>
             </a:r>
             <a:endParaRPr lang="en-US" sz="1400" dirty="0"/>
           </a:p>
@@ -4503,7 +4473,7 @@
                 <a:ea typeface="Calibri" panose="020F0502020204030204" pitchFamily="34" charset="-122"/>
                 <a:cs typeface="Calibri" panose="020F0502020204030204" pitchFamily="34" charset="-120"/>
               </a:rPr>
-              <a:t>Otomatis weekday Rp 35.000 dan weekend Rp 50.000 berdasarkan tanggal</a:t>
+              <a:t>Harga weekday Rp 35.000 dan weekend Rp 50.000 berdasarkan tanggal, bisa diubah jika ada acara tertentu</a:t>
             </a:r>
             <a:endParaRPr lang="en-US" sz="1050" dirty="0"/>
           </a:p>
@@ -4517,7 +4487,7 @@
         </p:nvSpPr>
         <p:spPr>
           <a:xfrm>
-            <a:off x="201168" y="3090672"/>
+            <a:off x="201803" y="3090672"/>
             <a:ext cx="2743200" cy="1737360"/>
           </a:xfrm>
           <a:prstGeom prst="rect">
@@ -4540,6 +4510,12 @@
             </a:outerShdw>
           </a:effectLst>
         </p:spPr>
+        <p:txBody>
+          <a:bodyPr/>
+          <a:p>
+            <a:endParaRPr lang="en-US"/>
+          </a:p>
+        </p:txBody>
       </p:sp>
       <p:sp>
         <p:nvSpPr>
@@ -4598,7 +4574,7 @@
                 <a:ea typeface="Calibri" panose="020F0502020204030204" pitchFamily="34" charset="-122"/>
                 <a:cs typeface="Calibri" panose="020F0502020204030204" pitchFamily="34" charset="-120"/>
               </a:rPr>
-              <a:t>📤  Upload Bukti</a:t>
+              <a:t>📤  Pembayaran Otomatis</a:t>
             </a:r>
             <a:endParaRPr lang="en-US" sz="1400" dirty="0"/>
           </a:p>
@@ -4657,15 +4633,8 @@
               <a:buNone/>
             </a:pPr>
             <a:r>
-              <a:rPr lang="en-US" sz="1050" dirty="0">
-                <a:solidFill>
-                  <a:srgbClr val="444444"/>
-                </a:solidFill>
-                <a:latin typeface="Calibri" panose="020F0502020204030204" pitchFamily="34" charset="0"/>
-                <a:ea typeface="Calibri" panose="020F0502020204030204" pitchFamily="34" charset="-122"/>
-                <a:cs typeface="Calibri" panose="020F0502020204030204" pitchFamily="34" charset="-120"/>
-              </a:rPr>
-              <a:t>Upload bukti transfer, pengelola verifikasi, status: belum/menunggu/lunas/ditolak</a:t>
+              <a:rPr lang="en-US" sz="1050" dirty="0"/>
+              <a:t>Pembayaran otomatis ( Payment Gateway ) midtrans</a:t>
             </a:r>
             <a:endParaRPr lang="en-US" sz="1050" dirty="0"/>
           </a:p>
@@ -5019,6 +4988,12 @@
             <a:prstDash val="solid"/>
           </a:ln>
         </p:spPr>
+        <p:txBody>
+          <a:bodyPr/>
+          <a:p>
+            <a:endParaRPr lang="en-US"/>
+          </a:p>
+        </p:txBody>
       </p:sp>
       <p:sp>
         <p:nvSpPr>
@@ -5043,17 +5018,6 @@
             <a:pPr marL="0" indent="0" algn="ctr">
               <a:buNone/>
             </a:pPr>
-            <a:r>
-              <a:rPr lang="en-US" sz="1100" dirty="0">
-                <a:solidFill>
-                  <a:srgbClr val="FFCC00"/>
-                </a:solidFill>
-                <a:latin typeface="Calibri" panose="020F0502020204030204" pitchFamily="34" charset="0"/>
-                <a:ea typeface="Calibri" panose="020F0502020204030204" pitchFamily="34" charset="-122"/>
-                <a:cs typeface="Calibri" panose="020F0502020204030204" pitchFamily="34" charset="-120"/>
-              </a:rPr>
-              <a:t>🛠  Teknologi: Python Flask  •  MySQL (XAMPP)  •  HTML/CSS  •  Font Awesome  •  JavaScript</a:t>
-            </a:r>
             <a:endParaRPr lang="en-US" sz="1100" dirty="0"/>
           </a:p>
         </p:txBody>
